--- a/catalog/samples/current_target_state.pptx
+++ b/catalog/samples/current_target_state.pptx
@@ -1022,7 +1022,7 @@
           </a:p>
           <a:p>
             <a:r>
-              <a:t>  "template_sha256": "49dde3232e59de048533e8e296ea33b0408b4d1024e8db7dfaeca91862c30d8d"</a:t>
+              <a:t>  "template_sha256": "1e916e944c9298878377156999e132c9931b4c19c7e22320a68a36283f6f68f2"</a:t>
             </a:r>
           </a:p>
           <a:p>
